--- a/Store Support/Projects/VET_Dashboard/reports/VET_Executive_Report_WK11.pptx
+++ b/Store Support/Projects/VET_Dashboard/reports/VET_Executive_Report_WK11.pptx
@@ -14,7 +14,6 @@
     <p:sldId id="262" r:id="rId13"/>
     <p:sldId id="263" r:id="rId14"/>
     <p:sldId id="264" r:id="rId15"/>
-    <p:sldId id="265" r:id="rId16"/>
   </p:sldIdLst>
   <p:sldSz cx="8778240" cy="6583680" type="screen4x3"/>
   <p:notesSz cx="6858000" cy="9144000"/>
@@ -3224,48 +3223,6 @@
 </p:sld>
 </file>
 
-<file path=ppt/slides/slide10.xml><?xml version="1.0" encoding="utf-8"?>
-<p:sld xmlns:a="http://schemas.openxmlformats.org/drawingml/2006/main" xmlns:p="http://schemas.openxmlformats.org/presentationml/2006/main" xmlns:r="http://schemas.openxmlformats.org/officeDocument/2006/relationships">
-  <p:cSld>
-    <p:spTree>
-      <p:nvGrpSpPr>
-        <p:cNvPr id="1" name=""/>
-        <p:cNvGrpSpPr/>
-        <p:nvPr/>
-      </p:nvGrpSpPr>
-      <p:grpSpPr/>
-      <p:pic>
-        <p:nvPicPr>
-          <p:cNvPr id="2" name="Picture 1" descr="image.jpg"/>
-          <p:cNvPicPr>
-            <a:picLocks noChangeAspect="1"/>
-          </p:cNvPicPr>
-          <p:nvPr/>
-        </p:nvPicPr>
-        <p:blipFill>
-          <a:blip r:embed="rId2"/>
-          <a:stretch>
-            <a:fillRect/>
-          </a:stretch>
-        </p:blipFill>
-        <p:spPr>
-          <a:xfrm>
-            <a:off x="0" y="0"/>
-            <a:ext cx="8778240" cy="3154388"/>
-          </a:xfrm>
-          <a:prstGeom prst="rect">
-            <a:avLst/>
-          </a:prstGeom>
-        </p:spPr>
-      </p:pic>
-    </p:spTree>
-  </p:cSld>
-  <p:clrMapOvr>
-    <a:masterClrMapping/>
-  </p:clrMapOvr>
-</p:sld>
-</file>
-
 <file path=ppt/slides/slide2.xml><?xml version="1.0" encoding="utf-8"?>
 <p:sld xmlns:a="http://schemas.openxmlformats.org/drawingml/2006/main" xmlns:p="http://schemas.openxmlformats.org/presentationml/2006/main" xmlns:r="http://schemas.openxmlformats.org/officeDocument/2006/relationships">
   <p:cSld>
@@ -3335,7 +3292,7 @@
         <p:spPr>
           <a:xfrm>
             <a:off x="0" y="0"/>
-            <a:ext cx="8778240" cy="5684422"/>
+            <a:ext cx="8778240" cy="5553960"/>
           </a:xfrm>
           <a:prstGeom prst="rect">
             <a:avLst/>
@@ -3377,7 +3334,7 @@
         <p:spPr>
           <a:xfrm>
             <a:off x="0" y="0"/>
-            <a:ext cx="8778240" cy="1141543"/>
+            <a:ext cx="8778240" cy="6583680"/>
           </a:xfrm>
           <a:prstGeom prst="rect">
             <a:avLst/>
@@ -3419,7 +3376,7 @@
         <p:spPr>
           <a:xfrm>
             <a:off x="0" y="0"/>
-            <a:ext cx="8778240" cy="6168996"/>
+            <a:ext cx="8778240" cy="5870797"/>
           </a:xfrm>
           <a:prstGeom prst="rect">
             <a:avLst/>
@@ -3461,7 +3418,7 @@
         <p:spPr>
           <a:xfrm>
             <a:off x="0" y="0"/>
-            <a:ext cx="8778240" cy="6131721"/>
+            <a:ext cx="8778240" cy="6583680"/>
           </a:xfrm>
           <a:prstGeom prst="rect">
             <a:avLst/>
@@ -3545,7 +3502,7 @@
         <p:spPr>
           <a:xfrm>
             <a:off x="0" y="0"/>
-            <a:ext cx="8778240" cy="6583680"/>
+            <a:ext cx="8778240" cy="3527137"/>
           </a:xfrm>
           <a:prstGeom prst="rect">
             <a:avLst/>
@@ -3587,7 +3544,7 @@
         <p:spPr>
           <a:xfrm>
             <a:off x="0" y="0"/>
-            <a:ext cx="8778240" cy="3527137"/>
+            <a:ext cx="8778240" cy="3154388"/>
           </a:xfrm>
           <a:prstGeom prst="rect">
             <a:avLst/>

--- a/Store Support/Projects/VET_Dashboard/reports/VET_Executive_Report_WK11.pptx
+++ b/Store Support/Projects/VET_Dashboard/reports/VET_Executive_Report_WK11.pptx
@@ -3292,7 +3292,7 @@
         <p:spPr>
           <a:xfrm>
             <a:off x="0" y="0"/>
-            <a:ext cx="8778240" cy="5553960"/>
+            <a:ext cx="8778240" cy="5032112"/>
           </a:xfrm>
           <a:prstGeom prst="rect">
             <a:avLst/>
@@ -3334,7 +3334,7 @@
         <p:spPr>
           <a:xfrm>
             <a:off x="0" y="0"/>
-            <a:ext cx="8778240" cy="6583680"/>
+            <a:ext cx="8778240" cy="6262183"/>
           </a:xfrm>
           <a:prstGeom prst="rect">
             <a:avLst/>
@@ -3376,7 +3376,7 @@
         <p:spPr>
           <a:xfrm>
             <a:off x="0" y="0"/>
-            <a:ext cx="8778240" cy="5870797"/>
+            <a:ext cx="8778240" cy="5740335"/>
           </a:xfrm>
           <a:prstGeom prst="rect">
             <a:avLst/>
@@ -3460,7 +3460,7 @@
         <p:spPr>
           <a:xfrm>
             <a:off x="0" y="0"/>
-            <a:ext cx="8778240" cy="6583680"/>
+            <a:ext cx="8778240" cy="5479410"/>
           </a:xfrm>
           <a:prstGeom prst="rect">
             <a:avLst/>
@@ -3502,7 +3502,7 @@
         <p:spPr>
           <a:xfrm>
             <a:off x="0" y="0"/>
-            <a:ext cx="8778240" cy="3527137"/>
+            <a:ext cx="8778240" cy="1048356"/>
           </a:xfrm>
           <a:prstGeom prst="rect">
             <a:avLst/>
@@ -3544,7 +3544,7 @@
         <p:spPr>
           <a:xfrm>
             <a:off x="0" y="0"/>
-            <a:ext cx="8778240" cy="3154388"/>
+            <a:ext cx="8778240" cy="3550434"/>
           </a:xfrm>
           <a:prstGeom prst="rect">
             <a:avLst/>

--- a/Store Support/Projects/VET_Dashboard/reports/VET_Executive_Report_WK11.pptx
+++ b/Store Support/Projects/VET_Dashboard/reports/VET_Executive_Report_WK11.pptx
@@ -3292,7 +3292,7 @@
         <p:spPr>
           <a:xfrm>
             <a:off x="0" y="0"/>
-            <a:ext cx="8778240" cy="5032112"/>
+            <a:ext cx="8778240" cy="5162574"/>
           </a:xfrm>
           <a:prstGeom prst="rect">
             <a:avLst/>
@@ -3334,7 +3334,7 @@
         <p:spPr>
           <a:xfrm>
             <a:off x="0" y="0"/>
-            <a:ext cx="8778240" cy="6262183"/>
+            <a:ext cx="8778240" cy="6583680"/>
           </a:xfrm>
           <a:prstGeom prst="rect">
             <a:avLst/>
@@ -3376,7 +3376,7 @@
         <p:spPr>
           <a:xfrm>
             <a:off x="0" y="0"/>
-            <a:ext cx="8778240" cy="5740335"/>
+            <a:ext cx="8778240" cy="5609873"/>
           </a:xfrm>
           <a:prstGeom prst="rect">
             <a:avLst/>
@@ -3460,7 +3460,7 @@
         <p:spPr>
           <a:xfrm>
             <a:off x="0" y="0"/>
-            <a:ext cx="8778240" cy="5479410"/>
+            <a:ext cx="8778240" cy="5609873"/>
           </a:xfrm>
           <a:prstGeom prst="rect">
             <a:avLst/>
@@ -3502,7 +3502,7 @@
         <p:spPr>
           <a:xfrm>
             <a:off x="0" y="0"/>
-            <a:ext cx="8778240" cy="1048356"/>
+            <a:ext cx="8778240" cy="1272006"/>
           </a:xfrm>
           <a:prstGeom prst="rect">
             <a:avLst/>
@@ -3544,7 +3544,7 @@
         <p:spPr>
           <a:xfrm>
             <a:off x="0" y="0"/>
-            <a:ext cx="8778240" cy="3550434"/>
+            <a:ext cx="8778240" cy="3154388"/>
           </a:xfrm>
           <a:prstGeom prst="rect">
             <a:avLst/>
